--- a/CreditTierForecast.pptx
+++ b/CreditTierForecast.pptx
@@ -485,7 +485,7 @@
       <c:layout/>
       <c:barChart>
         <c:barDir val="col"/>
-        <c:grouping val="stacked"/>
+        <c:grouping val="clustered"/>
         <c:varyColors val="0"/>
         <c:ser>
           <c:idx val="0"/>
@@ -515,9 +515,9 @@
               <a:lstStyle/>
               <a:p>
                 <a:pPr>
-                  <a:defRPr b="0" i="0" strike="noStrike" sz="1200" u="none">
+                  <a:defRPr b="0" i="0" strike="noStrike" sz="800" u="none">
                     <a:solidFill>
-                      <a:srgbClr val="000000"/>
+                      <a:srgbClr val="44546A"/>
                     </a:solidFill>
                     <a:latin typeface="Arial"/>
                   </a:defRPr>
@@ -525,7 +525,7 @@
               </a:p>
             </c:txPr>
             <c:showLegendKey val="0"/>
-            <c:showVal val="0"/>
+            <c:showVal val="1"/>
             <c:showCatName val="0"/>
             <c:showSerName val="0"/>
             <c:showPercent val="0"/>
@@ -616,9 +616,9 @@
               <a:lstStyle/>
               <a:p>
                 <a:pPr>
-                  <a:defRPr b="0" i="0" strike="noStrike" sz="1200" u="none">
+                  <a:defRPr b="0" i="0" strike="noStrike" sz="800" u="none">
                     <a:solidFill>
-                      <a:srgbClr val="000000"/>
+                      <a:srgbClr val="44546A"/>
                     </a:solidFill>
                     <a:latin typeface="Arial"/>
                   </a:defRPr>
@@ -626,7 +626,7 @@
               </a:p>
             </c:txPr>
             <c:showLegendKey val="0"/>
-            <c:showVal val="0"/>
+            <c:showVal val="1"/>
             <c:showCatName val="0"/>
             <c:showSerName val="0"/>
             <c:showPercent val="0"/>
@@ -717,9 +717,9 @@
               <a:lstStyle/>
               <a:p>
                 <a:pPr>
-                  <a:defRPr b="0" i="0" strike="noStrike" sz="1200" u="none">
+                  <a:defRPr b="0" i="0" strike="noStrike" sz="800" u="none">
                     <a:solidFill>
-                      <a:srgbClr val="000000"/>
+                      <a:srgbClr val="44546A"/>
                     </a:solidFill>
                     <a:latin typeface="Arial"/>
                   </a:defRPr>
@@ -727,7 +727,7 @@
               </a:p>
             </c:txPr>
             <c:showLegendKey val="0"/>
-            <c:showVal val="0"/>
+            <c:showVal val="1"/>
             <c:showCatName val="0"/>
             <c:showSerName val="0"/>
             <c:showPercent val="0"/>
@@ -818,9 +818,9 @@
               <a:lstStyle/>
               <a:p>
                 <a:pPr>
-                  <a:defRPr b="0" i="0" strike="noStrike" sz="1200" u="none">
+                  <a:defRPr b="0" i="0" strike="noStrike" sz="800" u="none">
                     <a:solidFill>
-                      <a:srgbClr val="000000"/>
+                      <a:srgbClr val="44546A"/>
                     </a:solidFill>
                     <a:latin typeface="Arial"/>
                   </a:defRPr>
@@ -828,7 +828,7 @@
               </a:p>
             </c:txPr>
             <c:showLegendKey val="0"/>
-            <c:showVal val="0"/>
+            <c:showVal val="1"/>
             <c:showCatName val="0"/>
             <c:showSerName val="0"/>
             <c:showPercent val="0"/>
@@ -898,9 +898,9 @@
             <a:lstStyle/>
             <a:p>
               <a:pPr>
-                <a:defRPr b="0" i="0" strike="noStrike" sz="1200" u="none">
+                <a:defRPr b="0" i="0" strike="noStrike" sz="800" u="none">
                   <a:solidFill>
-                    <a:srgbClr val="000000"/>
+                    <a:srgbClr val="44546A"/>
                   </a:solidFill>
                   <a:latin typeface="Arial"/>
                 </a:defRPr>
@@ -908,15 +908,15 @@
             </a:p>
           </c:txPr>
           <c:showLegendKey val="0"/>
-          <c:showVal val="0"/>
+          <c:showVal val="1"/>
           <c:showCatName val="0"/>
           <c:showSerName val="0"/>
           <c:showPercent val="0"/>
           <c:showBubbleSize val="0"/>
           <c:showLeaderLines val="0"/>
         </c:dLbls>
-        <c:gapWidth val="50"/>
-        <c:overlap val="100"/>
+        <c:gapWidth val="150"/>
+        <c:overlap val="0"/>
         <c:axId val="2094734554"/>
         <c:axId val="2094734552"/>
         <c:axId val="2094734556"/>
@@ -6236,7 +6236,7 @@
                 <a:ea typeface="Calibri" pitchFamily="34" charset="-122"/>
                 <a:cs typeface="Calibri" pitchFamily="34" charset="-120"/>
               </a:rPr>
-              <a:t>Each bar shows the total, broken into the four customer groups</a:t>
+              <a:t>Each customer group gets its own bar, with the exact number shown above it</a:t>
             </a:r>
             <a:endParaRPr lang="en-US" sz="1300" dirty="0"/>
           </a:p>
@@ -6249,8 +6249,8 @@
           <p:nvPr/>
         </p:nvGraphicFramePr>
         <p:xfrm>
-          <a:off x="822960" y="1691640"/>
-          <a:ext cx="10515600" cy="3931920"/>
+          <a:off x="457200" y="1691640"/>
+          <a:ext cx="11247120" cy="3931920"/>
         </p:xfrm>
         <a:graphic xmlns:a="http://schemas.openxmlformats.org/drawingml/2006/main">
           <a:graphicData uri="http://schemas.openxmlformats.org/drawingml/2006/chart">
